--- a/ゲーム科2年/00_前期/ゲーム開発Ⅲ/ゲーム物理学/座学/25_運動量と力積.pptx
+++ b/ゲーム科2年/00_前期/ゲーム開発Ⅲ/ゲーム物理学/座学/25_運動量と力積.pptx
@@ -265,7 +265,7 @@
           <a:p>
             <a:fld id="{E9CC885B-4903-4D54-9A93-00025F12DED9}" type="datetimeFigureOut">
               <a:rPr kumimoji="1" lang="ja-JP" altLang="en-US" smtClean="0"/>
-              <a:t>2025/10/28</a:t>
+              <a:t>2025/11/12</a:t>
             </a:fld>
             <a:endParaRPr kumimoji="1" lang="ja-JP" altLang="en-US"/>
           </a:p>
@@ -495,7 +495,7 @@
           <a:p>
             <a:fld id="{E9CC885B-4903-4D54-9A93-00025F12DED9}" type="datetimeFigureOut">
               <a:rPr kumimoji="1" lang="ja-JP" altLang="en-US" smtClean="0"/>
-              <a:t>2025/10/28</a:t>
+              <a:t>2025/11/12</a:t>
             </a:fld>
             <a:endParaRPr kumimoji="1" lang="ja-JP" altLang="en-US"/>
           </a:p>
@@ -735,7 +735,7 @@
           <a:p>
             <a:fld id="{E9CC885B-4903-4D54-9A93-00025F12DED9}" type="datetimeFigureOut">
               <a:rPr kumimoji="1" lang="ja-JP" altLang="en-US" smtClean="0"/>
-              <a:t>2025/10/28</a:t>
+              <a:t>2025/11/12</a:t>
             </a:fld>
             <a:endParaRPr kumimoji="1" lang="ja-JP" altLang="en-US"/>
           </a:p>
@@ -965,7 +965,7 @@
           <a:p>
             <a:fld id="{E9CC885B-4903-4D54-9A93-00025F12DED9}" type="datetimeFigureOut">
               <a:rPr kumimoji="1" lang="ja-JP" altLang="en-US" smtClean="0"/>
-              <a:t>2025/10/28</a:t>
+              <a:t>2025/11/12</a:t>
             </a:fld>
             <a:endParaRPr kumimoji="1" lang="ja-JP" altLang="en-US"/>
           </a:p>
@@ -1240,7 +1240,7 @@
           <a:p>
             <a:fld id="{E9CC885B-4903-4D54-9A93-00025F12DED9}" type="datetimeFigureOut">
               <a:rPr kumimoji="1" lang="ja-JP" altLang="en-US" smtClean="0"/>
-              <a:t>2025/10/28</a:t>
+              <a:t>2025/11/12</a:t>
             </a:fld>
             <a:endParaRPr kumimoji="1" lang="ja-JP" altLang="en-US"/>
           </a:p>
@@ -1569,7 +1569,7 @@
           <a:p>
             <a:fld id="{E9CC885B-4903-4D54-9A93-00025F12DED9}" type="datetimeFigureOut">
               <a:rPr kumimoji="1" lang="ja-JP" altLang="en-US" smtClean="0"/>
-              <a:t>2025/10/28</a:t>
+              <a:t>2025/11/12</a:t>
             </a:fld>
             <a:endParaRPr kumimoji="1" lang="ja-JP" altLang="en-US"/>
           </a:p>
@@ -2045,7 +2045,7 @@
           <a:p>
             <a:fld id="{E9CC885B-4903-4D54-9A93-00025F12DED9}" type="datetimeFigureOut">
               <a:rPr kumimoji="1" lang="ja-JP" altLang="en-US" smtClean="0"/>
-              <a:t>2025/10/28</a:t>
+              <a:t>2025/11/12</a:t>
             </a:fld>
             <a:endParaRPr kumimoji="1" lang="ja-JP" altLang="en-US"/>
           </a:p>
@@ -2186,7 +2186,7 @@
           <a:p>
             <a:fld id="{E9CC885B-4903-4D54-9A93-00025F12DED9}" type="datetimeFigureOut">
               <a:rPr kumimoji="1" lang="ja-JP" altLang="en-US" smtClean="0"/>
-              <a:t>2025/10/28</a:t>
+              <a:t>2025/11/12</a:t>
             </a:fld>
             <a:endParaRPr kumimoji="1" lang="ja-JP" altLang="en-US"/>
           </a:p>
@@ -2299,7 +2299,7 @@
           <a:p>
             <a:fld id="{E9CC885B-4903-4D54-9A93-00025F12DED9}" type="datetimeFigureOut">
               <a:rPr kumimoji="1" lang="ja-JP" altLang="en-US" smtClean="0"/>
-              <a:t>2025/10/28</a:t>
+              <a:t>2025/11/12</a:t>
             </a:fld>
             <a:endParaRPr kumimoji="1" lang="ja-JP" altLang="en-US"/>
           </a:p>
@@ -2642,7 +2642,7 @@
           <a:p>
             <a:fld id="{E9CC885B-4903-4D54-9A93-00025F12DED9}" type="datetimeFigureOut">
               <a:rPr kumimoji="1" lang="ja-JP" altLang="en-US" smtClean="0"/>
-              <a:t>2025/10/28</a:t>
+              <a:t>2025/11/12</a:t>
             </a:fld>
             <a:endParaRPr kumimoji="1" lang="ja-JP" altLang="en-US"/>
           </a:p>
@@ -2930,7 +2930,7 @@
           <a:p>
             <a:fld id="{E9CC885B-4903-4D54-9A93-00025F12DED9}" type="datetimeFigureOut">
               <a:rPr kumimoji="1" lang="ja-JP" altLang="en-US" smtClean="0"/>
-              <a:t>2025/10/28</a:t>
+              <a:t>2025/11/12</a:t>
             </a:fld>
             <a:endParaRPr kumimoji="1" lang="ja-JP" altLang="en-US"/>
           </a:p>
@@ -3203,7 +3203,7 @@
           <a:p>
             <a:fld id="{E9CC885B-4903-4D54-9A93-00025F12DED9}" type="datetimeFigureOut">
               <a:rPr kumimoji="1" lang="ja-JP" altLang="en-US" smtClean="0"/>
-              <a:t>2025/10/28</a:t>
+              <a:t>2025/11/12</a:t>
             </a:fld>
             <a:endParaRPr kumimoji="1" lang="ja-JP" altLang="en-US"/>
           </a:p>
@@ -3710,8 +3710,8 @@
           </a:p>
         </p:txBody>
       </p:sp>
-      <mc:AlternateContent xmlns:mc="http://schemas.openxmlformats.org/markup-compatibility/2006">
-        <mc:Choice xmlns:a14="http://schemas.microsoft.com/office/drawing/2010/main" Requires="a14">
+      <mc:AlternateContent xmlns:mc="http://schemas.openxmlformats.org/markup-compatibility/2006" xmlns:a14="http://schemas.microsoft.com/office/drawing/2010/main">
+        <mc:Choice Requires="a14">
           <p:sp>
             <p:nvSpPr>
               <p:cNvPr id="6" name="テキスト ボックス 5">
@@ -3903,7 +3903,7 @@
             </p:txBody>
           </p:sp>
         </mc:Choice>
-        <mc:Fallback>
+        <mc:Fallback xmlns="">
           <p:sp>
             <p:nvSpPr>
               <p:cNvPr id="6" name="テキスト ボックス 5">
@@ -4014,8 +4014,8 @@
           </a:p>
         </p:txBody>
       </p:sp>
-      <mc:AlternateContent xmlns:mc="http://schemas.openxmlformats.org/markup-compatibility/2006">
-        <mc:Choice xmlns:a14="http://schemas.microsoft.com/office/drawing/2010/main" Requires="a14">
+      <mc:AlternateContent xmlns:mc="http://schemas.openxmlformats.org/markup-compatibility/2006" xmlns:a14="http://schemas.microsoft.com/office/drawing/2010/main">
+        <mc:Choice Requires="a14">
           <p:sp>
             <p:nvSpPr>
               <p:cNvPr id="6" name="テキスト ボックス 5">
@@ -4314,7 +4314,7 @@
             </p:txBody>
           </p:sp>
         </mc:Choice>
-        <mc:Fallback>
+        <mc:Fallback xmlns="">
           <p:sp>
             <p:nvSpPr>
               <p:cNvPr id="6" name="テキスト ボックス 5">
@@ -4425,8 +4425,8 @@
           </a:p>
         </p:txBody>
       </p:sp>
-      <mc:AlternateContent xmlns:mc="http://schemas.openxmlformats.org/markup-compatibility/2006">
-        <mc:Choice xmlns:a14="http://schemas.microsoft.com/office/drawing/2010/main" Requires="a14">
+      <mc:AlternateContent xmlns:mc="http://schemas.openxmlformats.org/markup-compatibility/2006" xmlns:a14="http://schemas.microsoft.com/office/drawing/2010/main">
+        <mc:Choice Requires="a14">
           <p:sp>
             <p:nvSpPr>
               <p:cNvPr id="6" name="テキスト ボックス 5">
@@ -4803,7 +4803,7 @@
             </p:txBody>
           </p:sp>
         </mc:Choice>
-        <mc:Fallback>
+        <mc:Fallback xmlns="">
           <p:sp>
             <p:nvSpPr>
               <p:cNvPr id="6" name="テキスト ボックス 5">
@@ -4914,8 +4914,8 @@
           </a:p>
         </p:txBody>
       </p:sp>
-      <mc:AlternateContent xmlns:mc="http://schemas.openxmlformats.org/markup-compatibility/2006">
-        <mc:Choice xmlns:a14="http://schemas.microsoft.com/office/drawing/2010/main" Requires="a14">
+      <mc:AlternateContent xmlns:mc="http://schemas.openxmlformats.org/markup-compatibility/2006" xmlns:a14="http://schemas.microsoft.com/office/drawing/2010/main">
+        <mc:Choice Requires="a14">
           <p:sp>
             <p:nvSpPr>
               <p:cNvPr id="6" name="テキスト ボックス 5">
@@ -5317,7 +5317,7 @@
             </p:txBody>
           </p:sp>
         </mc:Choice>
-        <mc:Fallback>
+        <mc:Fallback xmlns="">
           <p:sp>
             <p:nvSpPr>
               <p:cNvPr id="6" name="テキスト ボックス 5">
@@ -5482,8 +5482,8 @@
           </a:p>
         </p:txBody>
       </p:sp>
-      <mc:AlternateContent xmlns:mc="http://schemas.openxmlformats.org/markup-compatibility/2006">
-        <mc:Choice xmlns:a14="http://schemas.microsoft.com/office/drawing/2010/main" Requires="a14">
+      <mc:AlternateContent xmlns:mc="http://schemas.openxmlformats.org/markup-compatibility/2006" xmlns:a14="http://schemas.microsoft.com/office/drawing/2010/main">
+        <mc:Choice Requires="a14">
           <p:sp>
             <p:nvSpPr>
               <p:cNvPr id="6" name="テキスト ボックス 5">
@@ -5701,7 +5701,7 @@
             </p:txBody>
           </p:sp>
         </mc:Choice>
-        <mc:Fallback>
+        <mc:Fallback xmlns="">
           <p:sp>
             <p:nvSpPr>
               <p:cNvPr id="6" name="テキスト ボックス 5">
@@ -5812,8 +5812,8 @@
           </a:p>
         </p:txBody>
       </p:sp>
-      <mc:AlternateContent xmlns:mc="http://schemas.openxmlformats.org/markup-compatibility/2006">
-        <mc:Choice xmlns:a14="http://schemas.microsoft.com/office/drawing/2010/main" Requires="a14">
+      <mc:AlternateContent xmlns:mc="http://schemas.openxmlformats.org/markup-compatibility/2006" xmlns:a14="http://schemas.microsoft.com/office/drawing/2010/main">
+        <mc:Choice Requires="a14">
           <p:sp>
             <p:nvSpPr>
               <p:cNvPr id="6" name="テキスト ボックス 5">
@@ -6292,13 +6292,7 @@
                       <a:rPr lang="en-US" altLang="ja-JP" sz="2400" b="0" i="1" dirty="0" smtClean="0">
                         <a:latin typeface="Cambria Math" panose="02040503050406030204" pitchFamily="18" charset="0"/>
                       </a:rPr>
-                      <m:t>0.045</m:t>
-                    </m:r>
-                    <m:r>
-                      <a:rPr lang="en-US" altLang="ja-JP" sz="2400" b="0" i="1" dirty="0" smtClean="0">
-                        <a:latin typeface="Cambria Math" panose="02040503050406030204" pitchFamily="18" charset="0"/>
-                      </a:rPr>
-                      <m:t>=</m:t>
+                      <m:t>0.045=</m:t>
                     </m:r>
                     <m:d>
                       <m:dPr>
@@ -6741,7 +6735,7 @@
             </p:txBody>
           </p:sp>
         </mc:Choice>
-        <mc:Fallback>
+        <mc:Fallback xmlns="">
           <p:sp>
             <p:nvSpPr>
               <p:cNvPr id="6" name="テキスト ボックス 5">
